--- a/docs/kickoff/Azure-Landing-Zone-Kickoff.pptx
+++ b/docs/kickoff/Azure-Landing-Zone-Kickoff.pptx
@@ -3291,7 +3291,7 @@
                 </a:solidFill>
                 <a:latin typeface="Calibri"/>
               </a:rPr>
-              <a:t>Kickoff · 15.06.2026</a:t>
+              <a:t>Kickoff · 16.06.2026</a:t>
             </a:r>
           </a:p>
         </p:txBody>
@@ -3467,7 +3467,7 @@
                 </a:solidFill>
                 <a:latin typeface="Calibri"/>
               </a:rPr>
-              <a:t>Hub-and-Spoke</a:t>
+              <a:t>Hub-and-Spoke · Microsoft-Default = alles an</a:t>
             </a:r>
           </a:p>
         </p:txBody>
@@ -3541,7 +3541,7 @@
                 </a:solidFill>
                 <a:latin typeface="Calibri"/>
               </a:rPr>
-              <a:t>• Hub-VNets: 10.0.0.0/22 (GWC) &amp; 10.1.0.0/22 (NE), bidirektional gepeert</a:t>
+              <a:t>• 2 Hub-VNets: 10.0.0.0/22 (GWC) &amp; 10.1.0.0/22 (NE), bidirektional gepeert</a:t>
             </a:r>
           </a:p>
           <a:p>
@@ -3557,7 +3557,7 @@
                 </a:solidFill>
                 <a:latin typeface="Calibri"/>
               </a:rPr>
-              <a:t>• Azure Firewall + Policy (DNS-Proxy, Azure-DNS, NTP, AzureCloud, Windows-Update; sonst Deny)</a:t>
+              <a:t>• Default aktiviert ALLE Dienste in BEIDEN Regionen: 2x Firewall · 2x Bastion · 2x VPN GW · 2x ER GW</a:t>
             </a:r>
           </a:p>
           <a:p>
@@ -3573,7 +3573,7 @@
                 </a:solidFill>
                 <a:latin typeface="Calibri"/>
               </a:rPr>
-              <a:t>• Azure Bastion · 37 Private DNS Zones · DNS Private Resolver (optional)</a:t>
+              <a:t>• DDoS Network Protection (Hub 1) · 2x DNS Private Resolver · Private DNS Zones</a:t>
             </a:r>
           </a:p>
           <a:p>
@@ -3589,7 +3589,7 @@
                 </a:solidFill>
                 <a:latin typeface="Calibri"/>
               </a:rPr>
-              <a:t>• Spokes leiten ausgehenden Verkehr per Route Table über die Firewall</a:t>
+              <a:t>• Summe Default ≈ €5.800/Monat (DDoS ~€2.500 davon)</a:t>
             </a:r>
           </a:p>
           <a:p>
@@ -3605,7 +3605,7 @@
                 </a:solidFill>
                 <a:latin typeface="Calibri"/>
               </a:rPr>
-              <a:t>• VPN/ExpressRoute-Gateway &amp; DDoS vorbereitet (standardmäßig aus)</a:t>
+              <a:t>• Kostenarm: network_type=none (nur MGs+Policies+Logging) oder deploy*-Schalter aus</a:t>
             </a:r>
           </a:p>
         </p:txBody>
@@ -3746,7 +3746,7 @@
                 </a:solidFill>
                 <a:latin typeface="Calibri"/>
               </a:rPr>
-              <a:t>Landing Zones &amp; Subscription Vending</a:t>
+              <a:t>Landing Zones &amp; Subscription-Platzierung</a:t>
             </a:r>
           </a:p>
         </p:txBody>
@@ -3852,7 +3852,7 @@
                 </a:solidFill>
                 <a:latin typeface="Calibri"/>
               </a:rPr>
-              <a:t>• Subscription Vending (AVM): automatische Platzierung in die richtige MG</a:t>
+              <a:t>• Platzierung über die Accelerator-MG-Struktur &amp; Bootstrap (kein eigenes Vending-Template)</a:t>
             </a:r>
           </a:p>
           <a:p>
@@ -3868,7 +3868,7 @@
                 </a:solidFill>
                 <a:latin typeface="Calibri"/>
               </a:rPr>
-              <a:t>• Default Placement-Modus · Neuanlage optional (EA/MCA-Billing)</a:t>
+              <a:t>• Bestehende Subscriptions einhängen → erben Policies/RBAC · Single-Subscription möglich</a:t>
             </a:r>
           </a:p>
         </p:txBody>
@@ -4022,8 +4022,8 @@
         </p:nvSpPr>
         <p:spPr>
           <a:xfrm>
-            <a:off x="457200" y="6446520"/>
-            <a:ext cx="8229600" cy="320040"/>
+            <a:off x="457200" y="1097280"/>
+            <a:ext cx="11247120" cy="457200"/>
           </a:xfrm>
           <a:prstGeom prst="rect">
             <a:avLst/>
@@ -4038,6 +4038,41 @@
           <a:p>
             <a:pPr algn="l"/>
             <a:r>
+              <a:rPr sz="1400" b="1">
+                <a:solidFill>
+                  <a:srgbClr val="605E5C"/>
+                </a:solidFill>
+                <a:latin typeface="Calibri"/>
+              </a:rPr>
+              <a:t>Offizieller Accelerator (Deploy-Accelerator)</a:t>
+            </a:r>
+          </a:p>
+        </p:txBody>
+      </p:sp>
+      <p:sp>
+        <p:nvSpPr>
+          <p:cNvPr id="6" name="TextBox 5"/>
+          <p:cNvSpPr txBox="1"/>
+          <p:nvPr/>
+        </p:nvSpPr>
+        <p:spPr>
+          <a:xfrm>
+            <a:off x="457200" y="6446520"/>
+            <a:ext cx="8229600" cy="320040"/>
+          </a:xfrm>
+          <a:prstGeom prst="rect">
+            <a:avLst/>
+          </a:prstGeom>
+          <a:noFill/>
+        </p:spPr>
+        <p:txBody>
+          <a:bodyPr wrap="square">
+            <a:spAutoFit/>
+          </a:bodyPr>
+          <a:lstStyle/>
+          <a:p>
+            <a:pPr algn="l"/>
+            <a:r>
               <a:rPr sz="900" b="0">
                 <a:solidFill>
                   <a:srgbClr val="605E5C"/>
@@ -4051,7 +4086,7 @@
       </p:sp>
       <p:sp>
         <p:nvSpPr>
-          <p:cNvPr id="6" name="TextBox 5"/>
+          <p:cNvPr id="7" name="TextBox 6"/>
           <p:cNvSpPr txBox="1"/>
           <p:nvPr/>
         </p:nvSpPr>
@@ -4077,13 +4112,13 @@
               </a:spcAft>
             </a:pPr>
             <a:r>
-              <a:rPr sz="1700">
+              <a:rPr sz="1600">
                 <a:solidFill>
                   <a:srgbClr val="243A5E"/>
                 </a:solidFill>
                 <a:latin typeface="Calibri"/>
               </a:rPr>
-              <a:t>• Bicep + Azure Verified Modules (Microsoft-Registry)</a:t>
+              <a:t>• Bicep + 22 Azure Verified Modules (Microsoft-Registry)</a:t>
             </a:r>
           </a:p>
           <a:p>
@@ -4093,13 +4128,13 @@
               </a:spcAft>
             </a:pPr>
             <a:r>
-              <a:rPr sz="1700">
+              <a:rPr sz="1600">
                 <a:solidFill>
                   <a:srgbClr val="243A5E"/>
                 </a:solidFill>
                 <a:latin typeface="Calibri"/>
               </a:rPr>
-              <a:t>• deploy.ps1: gestaffelte Schritte + optionale Schalter (Spoke, Vending, Security)</a:t>
+              <a:t>• Bootstrap (Phase 0): erstellt GitHub-Repo, passwortloses OIDC &amp; Pipelines</a:t>
             </a:r>
           </a:p>
           <a:p>
@@ -4109,13 +4144,13 @@
               </a:spcAft>
             </a:pPr>
             <a:r>
-              <a:rPr sz="1700">
+              <a:rPr sz="1600">
                 <a:solidFill>
                   <a:srgbClr val="243A5E"/>
                 </a:solidFill>
                 <a:latin typeface="Calibri"/>
               </a:rPr>
-              <a:t>• GitHub Actions: validate · what-if · preflight · deploy (nach Scope gated)</a:t>
+              <a:t>• Deploy-Accelerator liest config/inputs-github.yaml + platform-landing-zone.yaml</a:t>
             </a:r>
           </a:p>
           <a:p>
@@ -4125,13 +4160,13 @@
               </a:spcAft>
             </a:pPr>
             <a:r>
-              <a:rPr sz="1700">
+              <a:rPr sz="1600">
                 <a:solidFill>
                   <a:srgbClr val="243A5E"/>
                 </a:solidFill>
                 <a:latin typeface="Calibri"/>
               </a:rPr>
-              <a:t>• Passwortlose OIDC-Anmeldung (Federated Identity), Umgebung 'production'</a:t>
+              <a:t>• 18 geordnete Deploy-Stufen (Governance → Logging → Networking) über generierte Pipelines</a:t>
             </a:r>
           </a:p>
           <a:p>
@@ -4141,13 +4176,13 @@
               </a:spcAft>
             </a:pPr>
             <a:r>
-              <a:rPr sz="1700">
+              <a:rPr sz="1600">
                 <a:solidFill>
                   <a:srgbClr val="243A5E"/>
                 </a:solidFill>
                 <a:latin typeface="Calibri"/>
               </a:rPr>
-              <a:t>• Alle Templates bauen fehlerfrei (0 Errors / 0 Warnings)</a:t>
+              <a:t>• What-If vorab, Apply über Approval-Gate · Runbook: docs/ACCELERATOR-BOOTSTRAP.md</a:t>
             </a:r>
           </a:p>
         </p:txBody>
@@ -4301,8 +4336,8 @@
         </p:nvSpPr>
         <p:spPr>
           <a:xfrm>
-            <a:off x="457200" y="6446520"/>
-            <a:ext cx="8229600" cy="320040"/>
+            <a:off x="457200" y="1097280"/>
+            <a:ext cx="11247120" cy="457200"/>
           </a:xfrm>
           <a:prstGeom prst="rect">
             <a:avLst/>
@@ -4317,6 +4352,41 @@
           <a:p>
             <a:pPr algn="l"/>
             <a:r>
+              <a:rPr sz="1400" b="1">
+                <a:solidFill>
+                  <a:srgbClr val="605E5C"/>
+                </a:solidFill>
+                <a:latin typeface="Calibri"/>
+              </a:rPr>
+              <a:t>Basiert auf offiziellem Microsoft-Accelerator</a:t>
+            </a:r>
+          </a:p>
+        </p:txBody>
+      </p:sp>
+      <p:sp>
+        <p:nvSpPr>
+          <p:cNvPr id="6" name="TextBox 5"/>
+          <p:cNvSpPr txBox="1"/>
+          <p:nvPr/>
+        </p:nvSpPr>
+        <p:spPr>
+          <a:xfrm>
+            <a:off x="457200" y="6446520"/>
+            <a:ext cx="8229600" cy="320040"/>
+          </a:xfrm>
+          <a:prstGeom prst="rect">
+            <a:avLst/>
+          </a:prstGeom>
+          <a:noFill/>
+        </p:spPr>
+        <p:txBody>
+          <a:bodyPr wrap="square">
+            <a:spAutoFit/>
+          </a:bodyPr>
+          <a:lstStyle/>
+          <a:p>
+            <a:pPr algn="l"/>
+            <a:r>
               <a:rPr sz="900" b="0">
                 <a:solidFill>
                   <a:srgbClr val="605E5C"/>
@@ -4330,7 +4400,7 @@
       </p:sp>
       <p:graphicFrame>
         <p:nvGraphicFramePr>
-          <p:cNvPr id="6" name="Table 5"/>
+          <p:cNvPr id="7" name="Table 6"/>
           <p:cNvGraphicFramePr>
             <a:graphicFrameLocks noGrp="1"/>
           </p:cNvGraphicFramePr>
@@ -4406,7 +4476,7 @@
                             <a:srgbClr val="243A5E"/>
                           </a:solidFill>
                         </a:rPr>
-                        <a:t>Management Groups, Governance, RBAC</a:t>
+                        <a:t>Management Groups (12) + volles ALZ-Policy-Set</a:t>
                       </a:r>
                     </a:p>
                   </a:txBody>
@@ -4442,7 +4512,7 @@
                             <a:srgbClr val="243A5E"/>
                           </a:solidFill>
                         </a:rPr>
-                        <a:t>Logging / Monitoring</a:t>
+                        <a:t>RBAC (5 Custom-Rollen + Zuweisungen)</a:t>
                       </a:r>
                     </a:p>
                   </a:txBody>
@@ -4478,7 +4548,7 @@
                             <a:srgbClr val="243A5E"/>
                           </a:solidFill>
                         </a:rPr>
-                        <a:t>Security-Baseline (Defender, Contacts, Activity-Log)</a:t>
+                        <a:t>Logging via avm/ptn/alz/ama (LAW, 3 DCRs, MI)</a:t>
                       </a:r>
                     </a:p>
                   </a:txBody>
@@ -4514,7 +4584,7 @@
                             <a:srgbClr val="243A5E"/>
                           </a:solidFill>
                         </a:rPr>
-                        <a:t>Hub-Networking, Firewall, Bastion, DNS, Peering</a:t>
+                        <a:t>Defender for Cloud (via Deploy-MDFC-* Policies)</a:t>
                       </a:r>
                     </a:p>
                   </a:txBody>
@@ -4550,7 +4620,7 @@
                             <a:srgbClr val="243A5E"/>
                           </a:solidFill>
                         </a:rPr>
-                        <a:t>Spoke-Template &amp; Subscription Vending</a:t>
+                        <a:t>Hub-Networking (FW, Bastion, GW, DDoS, DNS)</a:t>
                       </a:r>
                     </a:p>
                   </a:txBody>
@@ -4564,10 +4634,10 @@
                       <a:r>
                         <a:rPr sz="1200" b="1">
                           <a:solidFill>
-                            <a:srgbClr val="0078D4"/>
+                            <a:srgbClr val="605E5C"/>
                           </a:solidFill>
                         </a:rPr>
-                        <a:t>Umgesetzt</a:t>
+                        <a:t>Umgesetzt (Default an)</a:t>
                       </a:r>
                     </a:p>
                   </a:txBody>
@@ -4586,7 +4656,7 @@
                             <a:srgbClr val="243A5E"/>
                           </a:solidFill>
                         </a:rPr>
-                        <a:t>CI/CD + OIDC</a:t>
+                        <a:t>Bootstrap + generierte Pipelines + OIDC</a:t>
                       </a:r>
                     </a:p>
                   </a:txBody>
@@ -4658,7 +4728,7 @@
                             <a:srgbClr val="243A5E"/>
                           </a:solidFill>
                         </a:rPr>
-                        <a:t>VPN/ExpressRoute · DDoS · Virtual WAN</a:t>
+                        <a:t>Virtual WAN (Alternative)</a:t>
                       </a:r>
                     </a:p>
                   </a:txBody>
@@ -4896,7 +4966,7 @@
                 </a:solidFill>
                 <a:latin typeface="Calibri"/>
               </a:rPr>
-              <a:t>• Smoke Run im Kunden-Tenant (What-If → MGs → Logging → Networking)</a:t>
+              <a:t>• Bootstrap im Kunden-Tenant ausführen (Deploy-Accelerator), dann What-If → Apply</a:t>
             </a:r>
           </a:p>
           <a:p>
@@ -4912,7 +4982,7 @@
                 </a:solidFill>
                 <a:latin typeface="Calibri"/>
               </a:rPr>
-              <a:t>• Identity-Domäne ausgestalten (Entra-Diagnose, hybride Anbindung)</a:t>
+              <a:t>• Netzwerk-Scope festlegen: voller Default (~€5.800/Mon.) vs. kostenarm (network_type=none / Schalter aus)</a:t>
             </a:r>
           </a:p>
           <a:p>
@@ -4928,7 +4998,7 @@
                 </a:solidFill>
                 <a:latin typeface="Calibri"/>
               </a:rPr>
-              <a:t>• Sentinel-Onboarding (Data Connectors, Analyseregeln)</a:t>
+              <a:t>• Guardrail-Initiativen mit DoNotEnforce nach Compliance scharfschalten</a:t>
             </a:r>
           </a:p>
           <a:p>
@@ -4944,7 +5014,7 @@
                 </a:solidFill>
                 <a:latin typeface="Calibri"/>
               </a:rPr>
-              <a:t>• On-Prem-Konnektivität aktivieren (VPN / ExpressRoute)</a:t>
+              <a:t>• Identity-Domäne ausgestalten (Entra-Diagnose, hybride Anbindung)</a:t>
             </a:r>
           </a:p>
           <a:p>
@@ -4960,7 +5030,7 @@
                 </a:solidFill>
                 <a:latin typeface="Calibri"/>
               </a:rPr>
-              <a:t>• Governance bei Bedarf auf volles ALZ-Policy-Set erweitern</a:t>
+              <a:t>• Sentinel-Onboarding (Data Connectors, Analyseregeln)</a:t>
             </a:r>
           </a:p>
           <a:p>
@@ -4976,7 +5046,7 @@
                 </a:solidFill>
                 <a:latin typeface="Calibri"/>
               </a:rPr>
-              <a:t>• Härtung: Resource Locks, erweiterte Diagnostics, Cost Management</a:t>
+              <a:t>• On-Prem-Konnektivität abstimmen (VPN / ExpressRoute)</a:t>
             </a:r>
           </a:p>
         </p:txBody>
@@ -5226,7 +5296,7 @@
                 </a:solidFill>
                 <a:latin typeface="Calibri"/>
               </a:rPr>
-              <a:t>• Netzwerk-Topologie (Hub-Spoke vs. vWAN)</a:t>
+              <a:t>• Netzwerk-Scope &amp; Kosten (Default ~€5.800 vs. kostenarm)</a:t>
             </a:r>
           </a:p>
           <a:p>
@@ -5242,7 +5312,7 @@
                 </a:solidFill>
                 <a:latin typeface="Calibri"/>
               </a:rPr>
-              <a:t>• IP-Adresskonzept / On-Prem-Overlap</a:t>
+              <a:t>• Netzwerk-Topologie (Hub-Spoke vs. vWAN)</a:t>
             </a:r>
           </a:p>
           <a:p>
@@ -5258,7 +5328,7 @@
                 </a:solidFill>
                 <a:latin typeface="Calibri"/>
               </a:rPr>
-              <a:t>• Regionen &amp; Datenresidenz</a:t>
+              <a:t>• IP-Adresskonzept / On-Prem-Overlap</a:t>
             </a:r>
           </a:p>
           <a:p>
@@ -5274,7 +5344,7 @@
                 </a:solidFill>
                 <a:latin typeface="Calibri"/>
               </a:rPr>
-              <a:t>• On-Prem-Anbindung: VPN vs. ExpressRoute</a:t>
+              <a:t>• Regionen &amp; Datenresidenz</a:t>
             </a:r>
           </a:p>
           <a:p>
@@ -5290,7 +5360,7 @@
                 </a:solidFill>
                 <a:latin typeface="Calibri"/>
               </a:rPr>
-              <a:t>• DDoS Protection (Kostenfaktor)</a:t>
+              <a:t>• On-Prem-Anbindung: VPN vs. ExpressRoute</a:t>
             </a:r>
           </a:p>
           <a:p>
@@ -5306,7 +5376,7 @@
                 </a:solidFill>
                 <a:latin typeface="Calibri"/>
               </a:rPr>
-              <a:t>• Identity: Entra-only / hybrid</a:t>
+              <a:t>• DDoS Protection (Default an, Kostenfaktor)</a:t>
             </a:r>
           </a:p>
         </p:txBody>
@@ -5361,7 +5431,7 @@
                 </a:solidFill>
                 <a:latin typeface="Calibri"/>
               </a:rPr>
-              <a:t>• Policy-Tiefe / Compliance-Frameworks</a:t>
+              <a:t>• Guardrail-Enforcement (DoNotEnforce scharfschalten)</a:t>
             </a:r>
           </a:p>
           <a:p>
@@ -5409,7 +5479,7 @@
                 </a:solidFill>
                 <a:latin typeface="Calibri"/>
               </a:rPr>
-              <a:t>• Subscription Vending: Placement vs. Neuanlage</a:t>
+              <a:t>• Single- vs. Multi-Subscription</a:t>
             </a:r>
           </a:p>
           <a:p>
@@ -5601,7 +5671,7 @@
                 </a:solidFill>
                 <a:latin typeface="Calibri"/>
               </a:rPr>
-              <a:t>Nächster Schritt: Smoke Run im Kunden-Tenant (risikofrei, beginnend mit What-If)</a:t>
+              <a:t>Nächster Schritt: Bootstrap im Kunden-Tenant (Deploy-Accelerator), dann What-If → Apply</a:t>
             </a:r>
           </a:p>
         </p:txBody>
@@ -6912,7 +6982,7 @@
                 </a:solidFill>
                 <a:latin typeface="Calibri"/>
               </a:rPr>
-              <a:t>Management Groups · Policy · RBAC</a:t>
+              <a:t>Volles ALZ-Policy-Set (offizieller Accelerator)</a:t>
             </a:r>
           </a:p>
         </p:txBody>
@@ -6980,13 +7050,13 @@
               </a:spcAft>
             </a:pPr>
             <a:r>
-              <a:rPr sz="1700">
+              <a:rPr sz="1600">
                 <a:solidFill>
                   <a:srgbClr val="243A5E"/>
                 </a:solidFill>
                 <a:latin typeface="Calibri"/>
               </a:rPr>
-              <a:t>• MG-Hierarchie per Bicep auf Tenant-Ebene</a:t>
+              <a:t>• 12 Management Groups + volles ALZ-Set: 149 Policy-Definitionen · 42 Initiativen · 123 Assignments · 5 Custom-Rollen</a:t>
             </a:r>
           </a:p>
           <a:p>
@@ -6996,13 +7066,13 @@
               </a:spcAft>
             </a:pPr>
             <a:r>
-              <a:rPr sz="1700">
+              <a:rPr sz="1600">
                 <a:solidFill>
                   <a:srgbClr val="243A5E"/>
                 </a:solidFill>
                 <a:latin typeface="Calibri"/>
               </a:rPr>
-              <a:t>• Guardrails: Allowed Locations · Require-RG-Tag · Storage-HTTPS (Deny)</a:t>
+              <a:t>• alz (Root): 17 Assignments – v. a. Defender-Onboarding, Activity-Log/Diagnose, Compute Security Baseline</a:t>
             </a:r>
           </a:p>
           <a:p>
@@ -7012,13 +7082,13 @@
               </a:spcAft>
             </a:pPr>
             <a:r>
-              <a:rPr sz="1700">
+              <a:rPr sz="1600">
                 <a:solidFill>
                   <a:srgbClr val="243A5E"/>
                 </a:solidFill>
                 <a:latin typeface="Calibri"/>
               </a:rPr>
-              <a:t>• Corp: keine Public IPs an NICs · Decommissioned: Neuanlage gesperrt · Sandbox: Tag-Ausnahme</a:t>
+              <a:t>• landingzones: 53 · platform: 40 · corp: 5 (Deny Public Endpoints/IP, Hybrid Networking, Private DNS)</a:t>
             </a:r>
           </a:p>
           <a:p>
@@ -7028,13 +7098,13 @@
               </a:spcAft>
             </a:pPr>
             <a:r>
-              <a:rPr sz="1700">
+              <a:rPr sz="1600">
                 <a:solidFill>
                   <a:srgbClr val="243A5E"/>
                 </a:solidFill>
                 <a:latin typeface="Calibri"/>
               </a:rPr>
-              <a:t>• RBAC-Modul: Owner/Contributor/Reader an Entra-Gruppen je MG (Object-IDs durch Kunde)</a:t>
+              <a:t>• DeployIfNotExists/Modify legen Remediation-Identities automatisch an</a:t>
             </a:r>
           </a:p>
           <a:p>
@@ -7044,13 +7114,13 @@
               </a:spcAft>
             </a:pPr>
             <a:r>
-              <a:rPr sz="1700">
+              <a:rPr sz="1600">
                 <a:solidFill>
                   <a:srgbClr val="243A5E"/>
                 </a:solidFill>
                 <a:latin typeface="Calibri"/>
               </a:rPr>
-              <a:t>• Erweiterbar auf das vollständige ALZ-Policy-Set / Compliance-Frameworks</a:t>
+              <a:t>• RBAC: 5 Custom-Rollen + Zuweisung an Entra-Gruppen je MG (Object-IDs durch Kunde)</a:t>
             </a:r>
           </a:p>
         </p:txBody>
@@ -7524,7 +7594,7 @@
                 </a:solidFill>
                 <a:latin typeface="Calibri"/>
               </a:rPr>
-              <a:t>Zentrale Protokollierung</a:t>
+              <a:t>Zentrale Protokollierung (avm/ptn/alz/ama)</a:t>
             </a:r>
           </a:p>
         </p:txBody>
@@ -7598,7 +7668,7 @@
                 </a:solidFill>
                 <a:latin typeface="Calibri"/>
               </a:rPr>
-              <a:t>• Log Analytics Workspace (365 Tage Aufbewahrung)</a:t>
+              <a:t>• AMA-Pattern (Azure Monitor Agent) statt eigener DCR-Logik</a:t>
             </a:r>
           </a:p>
           <a:p>
@@ -7614,7 +7684,7 @@
                 </a:solidFill>
                 <a:latin typeface="Calibri"/>
               </a:rPr>
-              <a:t>• Data Collection Rules: VM Insights · Change Tracking · Defender-for-SQL</a:t>
+              <a:t>• Log Analytics Workspace (365 Tage, PerGB2018)</a:t>
             </a:r>
           </a:p>
           <a:p>
@@ -7630,7 +7700,7 @@
                 </a:solidFill>
                 <a:latin typeface="Calibri"/>
               </a:rPr>
-              <a:t>• User-Assigned Managed Identity</a:t>
+              <a:t>• 3 Data Collection Rules: VM Insights · Change Tracking · Defender-for-SQL</a:t>
             </a:r>
           </a:p>
           <a:p>
@@ -7646,7 +7716,23 @@
                 </a:solidFill>
                 <a:latin typeface="Calibri"/>
               </a:rPr>
-              <a:t>• Microsoft Sentinel &amp; Automation Account per Schalter zuschaltbar</a:t>
+              <a:t>• User-Assigned Managed Identity · ChangeTracking-Solution</a:t>
+            </a:r>
+          </a:p>
+          <a:p>
+            <a:pPr>
+              <a:spcAft>
+                <a:spcPts val="600"/>
+              </a:spcAft>
+            </a:pPr>
+            <a:r>
+              <a:rPr sz="1700">
+                <a:solidFill>
+                  <a:srgbClr val="243A5E"/>
+                </a:solidFill>
+                <a:latin typeface="Calibri"/>
+              </a:rPr>
+              <a:t>• Automation Account &amp; Microsoft Sentinel per Schalter zuschaltbar</a:t>
             </a:r>
           </a:p>
         </p:txBody>
@@ -7822,7 +7908,7 @@
                 </a:solidFill>
                 <a:latin typeface="Calibri"/>
               </a:rPr>
-              <a:t>Microsoft Defender for Cloud</a:t>
+              <a:t>Defender for Cloud – automatisch via Policy</a:t>
             </a:r>
           </a:p>
         </p:txBody>
@@ -7896,7 +7982,7 @@
                 </a:solidFill>
                 <a:latin typeface="Calibri"/>
               </a:rPr>
-              <a:t>• Defender-Pläne: VMs · Storage · Key Vault · ARM · Container · App Service · SQL · DB</a:t>
+              <a:t>• Kein eigenes Security-Template mehr – Onboarding über Deploy-MDFC-* Assignments auf alz</a:t>
             </a:r>
           </a:p>
           <a:p>
@@ -7912,7 +7998,7 @@
                 </a:solidFill>
                 <a:latin typeface="Calibri"/>
               </a:rPr>
-              <a:t>• Security Contacts mit Alarm-Benachrichtigung (Schweregrad-Schwelle)</a:t>
+              <a:t>• Deploy-MDFC-Config · Deploy-MDEndpoints · Deploy-MDFC-OssDb · Deploy-MDFC-SqlAtp</a:t>
             </a:r>
           </a:p>
           <a:p>
@@ -7928,7 +8014,7 @@
                 </a:solidFill>
                 <a:latin typeface="Calibri"/>
               </a:rPr>
-              <a:t>• Activity-Log je Subscription → Log Analytics (Administrative, Security, Policy …)</a:t>
+              <a:t>• Activity-Log/Diagnose je Subscription → Log Analytics · Compute Security Baseline (Enforce-ACSB)</a:t>
             </a:r>
           </a:p>
           <a:p>
@@ -7944,7 +8030,7 @@
                 </a:solidFill>
                 <a:latin typeface="Calibri"/>
               </a:rPr>
-              <a:t>• Tier Standard/Free konfigurierbar · Sentinel-Onboarding vorbereitet</a:t>
+              <a:t>• Defender-Pläne auf Standard-Tier (kostenpflichtig, pro Ressource) · Sentinel vorbereitet</a:t>
             </a:r>
           </a:p>
         </p:txBody>
